--- a/DataAnalysis_Track/decks/DA_S06_Your_first_program.pptx
+++ b/DataAnalysis_Track/decks/DA_S06_Your_first_program.pptx
@@ -481,7 +481,7 @@
 </file>
 
 <file path=ppt/notesSlides/notesSlide1.xml><?xml version="1.0" encoding="utf-8"?>
-<p:notes xmlns:a="http://schemas.openxmlformats.org/drawingml/2006/main" xmlns:p="http://schemas.openxmlformats.org/presentationml/2006/main" xmlns:r="http://schemas.openxmlformats.org/officeDocument/2006/relationships">
+<p:notes xmlns:a="http://schemas.openxmlformats.org/drawingml/2006/main" xmlns:p="http://schemas.openxmlformats.org/presentationml/2006/main">
   <p:cSld>
     <p:spTree>
       <p:nvGrpSpPr>
@@ -525,7 +525,87 @@
           <a:lstStyle/>
           <a:p>
             <a:r>
+              <a:t>TEACHING PURPOSE</a:t>
+            </a:r>
+          </a:p>
+          <a:p>
+            <a:r>
+              <a:t>Your first program</a:t>
+            </a:r>
+          </a:p>
+          <a:p>
+            <a:r>
+              <a:t/>
+            </a:r>
+          </a:p>
+          <a:p>
+            <a:r>
+              <a:t>LECTURER CUE</a:t>
+            </a:r>
+          </a:p>
+          <a:p>
+            <a:r>
               <a:t>Start on time.</a:t>
+            </a:r>
+          </a:p>
+          <a:p>
+            <a:r>
+              <a:t/>
+            </a:r>
+          </a:p>
+          <a:p>
+            <a:r>
+              <a:t>EXPLAIN IN ORDINARY WORDS</a:t>
+            </a:r>
+          </a:p>
+          <a:p>
+            <a:r>
+              <a:t>A function is a named set of instructions. def defines it; a call runs it with inputs. Parameters are input names, arguments are supplied values, and return sends the result back.</a:t>
+            </a:r>
+          </a:p>
+          <a:p>
+            <a:r>
+              <a:t/>
+            </a:r>
+          </a:p>
+          <a:p>
+            <a:r>
+              <a:t>CHECK AND EXPECTED ANSWER</a:t>
+            </a:r>
+          </a:p>
+          <a:p>
+            <a:r>
+              <a:t>Does print(8) return the number 8 to the caller? No; it displays 8 and returns None. A function needing a numeric result should return it.</a:t>
+            </a:r>
+          </a:p>
+          <a:p>
+            <a:r>
+              <a:t/>
+            </a:r>
+          </a:p>
+          <a:p>
+            <a:r>
+              <a:t>IF LEARNERS ARE STUCK</a:t>
+            </a:r>
+          </a:p>
+          <a:p>
+            <a:r>
+              <a:t>Trace one call: bind input names, run the indented body, reach return, then put the returned result back into the calling expression.</a:t>
+            </a:r>
+          </a:p>
+          <a:p>
+            <a:r>
+              <a:t/>
+            </a:r>
+          </a:p>
+          <a:p>
+            <a:r>
+              <a:t>NEXT</a:t>
+            </a:r>
+          </a:p>
+          <a:p>
+            <a:r>
+              <a:t>Where tonight sits. Move on after a learner can explain the current example or required action.</a:t>
             </a:r>
           </a:p>
         </p:txBody>
@@ -551,7 +631,7 @@
 </file>
 
 <file path=ppt/notesSlides/notesSlide10.xml><?xml version="1.0" encoding="utf-8"?>
-<p:notes xmlns:a="http://schemas.openxmlformats.org/drawingml/2006/main" xmlns:p="http://schemas.openxmlformats.org/presentationml/2006/main" xmlns:r="http://schemas.openxmlformats.org/officeDocument/2006/relationships">
+<p:notes xmlns:a="http://schemas.openxmlformats.org/drawingml/2006/main" xmlns:p="http://schemas.openxmlformats.org/presentationml/2006/main">
   <p:cSld>
     <p:spTree>
       <p:nvGrpSpPr>
@@ -595,7 +675,57 @@
           <a:lstStyle/>
           <a:p>
             <a:r>
+              <a:t>TEACHING PURPOSE</a:t>
+            </a:r>
+          </a:p>
+          <a:p>
+            <a:r>
+              <a:t>Traceback</a:t>
+            </a:r>
+          </a:p>
+          <a:p>
+            <a:r>
+              <a:t/>
+            </a:r>
+          </a:p>
+          <a:p>
+            <a:r>
+              <a:t>CONNECT</a:t>
+            </a:r>
+          </a:p>
+          <a:p>
+            <a:r>
+              <a:t>Build on the preceding slide: Library.</a:t>
+            </a:r>
+          </a:p>
+          <a:p>
+            <a:r>
+              <a:t/>
+            </a:r>
+          </a:p>
+          <a:p>
+            <a:r>
+              <a:t>LECTURER CUE</a:t>
+            </a:r>
+          </a:p>
+          <a:p>
+            <a:r>
               <a:t>The error message Python prints when something goes wrong. It is long, it looks alarming, and the LAST line is the one that names the problem.</a:t>
+            </a:r>
+          </a:p>
+          <a:p>
+            <a:r>
+              <a:t/>
+            </a:r>
+          </a:p>
+          <a:p>
+            <a:r>
+              <a:t>NEXT</a:t>
+            </a:r>
+          </a:p>
+          <a:p>
+            <a:r>
+              <a:t>Zero-based counting. Move on after a learner can explain the current example or required action.</a:t>
             </a:r>
           </a:p>
         </p:txBody>
@@ -620,8 +750,8 @@
 </p:notes>
 </file>
 
-<file path=ppt/notesSlides/notesSlide11.xml><?xml version="1.0" encoding="utf-8"?>
-<p:notes xmlns:a="http://schemas.openxmlformats.org/drawingml/2006/main" xmlns:p="http://schemas.openxmlformats.org/presentationml/2006/main" xmlns:r="http://schemas.openxmlformats.org/officeDocument/2006/relationships">
+<file path=ppt/notesSlides/notesSlide10006.xml><?xml version="1.0" encoding="utf-8"?>
+<p:notes xmlns:a="http://schemas.openxmlformats.org/drawingml/2006/main" xmlns:p="http://schemas.openxmlformats.org/presentationml/2006/main">
   <p:cSld>
     <p:spTree>
       <p:nvGrpSpPr>
@@ -665,7 +795,57 @@
           <a:lstStyle/>
           <a:p>
             <a:r>
-              <a:t>Python counts from 0, so the first row is row 0 and the first item of a list is item 0.</a:t>
+              <a:t>TEACHING PURPOSE</a:t>
+            </a:r>
+          </a:p>
+          <a:p>
+            <a:r>
+              <a:t>You already write code</a:t>
+            </a:r>
+          </a:p>
+          <a:p>
+            <a:r>
+              <a:t/>
+            </a:r>
+          </a:p>
+          <a:p>
+            <a:r>
+              <a:t>CONNECT</a:t>
+            </a:r>
+          </a:p>
+          <a:p>
+            <a:r>
+              <a:t>Build on the preceding slide: You have never programmed..</a:t>
+            </a:r>
+          </a:p>
+          <a:p>
+            <a:r>
+              <a:t/>
+            </a:r>
+          </a:p>
+          <a:p>
+            <a:r>
+              <a:t>DELIVER THIS SLIDE</a:t>
+            </a:r>
+          </a:p>
+          <a:p>
+            <a:r>
+              <a:t>Read the stated purpose, then point to the named example or action on the slide. Ask learners to describe what they will do before moving on. For a break slide, announce the return time; for a section divider, name the next concrete task.</a:t>
+            </a:r>
+          </a:p>
+          <a:p>
+            <a:r>
+              <a:t/>
+            </a:r>
+          </a:p>
+          <a:p>
+            <a:r>
+              <a:t>NEXT</a:t>
+            </a:r>
+          </a:p>
+          <a:p>
+            <a:r>
+              <a:t>A spreadsheet formula, with the parts named. Move on after a learner can explain the current example or required action.</a:t>
             </a:r>
           </a:p>
         </p:txBody>
@@ -690,8 +870,8 @@
 </p:notes>
 </file>
 
-<file path=ppt/notesSlides/notesSlide12.xml><?xml version="1.0" encoding="utf-8"?>
-<p:notes xmlns:a="http://schemas.openxmlformats.org/drawingml/2006/main" xmlns:p="http://schemas.openxmlformats.org/presentationml/2006/main" xmlns:r="http://schemas.openxmlformats.org/officeDocument/2006/relationships">
+<file path=ppt/notesSlides/notesSlide10015.xml><?xml version="1.0" encoding="utf-8"?>
+<p:notes xmlns:a="http://schemas.openxmlformats.org/drawingml/2006/main" xmlns:p="http://schemas.openxmlformats.org/presentationml/2006/main">
   <p:cSld>
     <p:spTree>
       <p:nvGrpSpPr>
@@ -733,7 +913,91 @@
         <p:txBody>
           <a:bodyPr/>
           <a:lstStyle/>
-          <a:p/>
+          <a:p>
+            <a:r>
+              <a:t>TEACHING PURPOSE</a:t>
+            </a:r>
+          </a:p>
+          <a:p>
+            <a:r>
+              <a:t>Your first DataFrame</a:t>
+            </a:r>
+          </a:p>
+          <a:p>
+            <a:r>
+              <a:t/>
+            </a:r>
+          </a:p>
+          <a:p>
+            <a:r>
+              <a:t>CONNECT</a:t>
+            </a:r>
+          </a:p>
+          <a:p>
+            <a:r>
+              <a:t>Build on the preceding slide: Break.</a:t>
+            </a:r>
+          </a:p>
+          <a:p>
+            <a:r>
+              <a:t/>
+            </a:r>
+          </a:p>
+          <a:p>
+            <a:r>
+              <a:t>EXPLAIN IN ORDINARY WORDS</a:t>
+            </a:r>
+          </a:p>
+          <a:p>
+            <a:r>
+              <a:t>A DataFrame is a labelled table. A Series is a single labelled sequence, often one column. A dtype describes stored values, but the import may infer something unsuitable.</a:t>
+            </a:r>
+          </a:p>
+          <a:p>
+            <a:r>
+              <a:t/>
+            </a:r>
+          </a:p>
+          <a:p>
+            <a:r>
+              <a:t>CHECK AND EXPECTED ANSWER</a:t>
+            </a:r>
+          </a:p>
+          <a:p>
+            <a:r>
+              <a:t>Does a price that looks numeric prove the column is numeric? No. Inspect its dtype and troublesome values before conversion.</a:t>
+            </a:r>
+          </a:p>
+          <a:p>
+            <a:r>
+              <a:t/>
+            </a:r>
+          </a:p>
+          <a:p>
+            <a:r>
+              <a:t>IF LEARNERS ARE STUCK</a:t>
+            </a:r>
+          </a:p>
+          <a:p>
+            <a:r>
+              <a:t>Use head, shape and dtypes to locate the table, count rows/columns and inspect storage. Check units and missing values before calculating.</a:t>
+            </a:r>
+          </a:p>
+          <a:p>
+            <a:r>
+              <a:t/>
+            </a:r>
+          </a:p>
+          <a:p>
+            <a:r>
+              <a:t>NEXT</a:t>
+            </a:r>
+          </a:p>
+          <a:p>
+            <a:r>
+              <a:t>Make three errors on purpose. Move on after a learner can explain the current example or required action.</a:t>
+            </a:r>
+          </a:p>
         </p:txBody>
       </p:sp>
       <p:sp>
@@ -756,8 +1020,8 @@
 </p:notes>
 </file>
 
-<file path=ppt/notesSlides/notesSlide13.xml><?xml version="1.0" encoding="utf-8"?>
-<p:notes xmlns:a="http://schemas.openxmlformats.org/drawingml/2006/main" xmlns:p="http://schemas.openxmlformats.org/presentationml/2006/main" xmlns:r="http://schemas.openxmlformats.org/officeDocument/2006/relationships">
+<file path=ppt/notesSlides/notesSlide11.xml><?xml version="1.0" encoding="utf-8"?>
+<p:notes xmlns:a="http://schemas.openxmlformats.org/drawingml/2006/main" xmlns:p="http://schemas.openxmlformats.org/presentationml/2006/main">
   <p:cSld>
     <p:spTree>
       <p:nvGrpSpPr>
@@ -801,7 +1065,102 @@
           <a:lstStyle/>
           <a:p>
             <a:r>
-              <a:t>Ten minutes.</a:t>
+              <a:t>TEACHING PURPOSE</a:t>
+            </a:r>
+          </a:p>
+          <a:p>
+            <a:r>
+              <a:t>Zero-based counting</a:t>
+            </a:r>
+          </a:p>
+          <a:p>
+            <a:r>
+              <a:t/>
+            </a:r>
+          </a:p>
+          <a:p>
+            <a:r>
+              <a:t>CONNECT</a:t>
+            </a:r>
+          </a:p>
+          <a:p>
+            <a:r>
+              <a:t>Build on the preceding slide: Traceback.</a:t>
+            </a:r>
+          </a:p>
+          <a:p>
+            <a:r>
+              <a:t/>
+            </a:r>
+          </a:p>
+          <a:p>
+            <a:r>
+              <a:t>LECTURER CUE</a:t>
+            </a:r>
+          </a:p>
+          <a:p>
+            <a:r>
+              <a:t>Python counts from 0, so the first row is row 0 and the first item of a list is item 0.</a:t>
+            </a:r>
+          </a:p>
+          <a:p>
+            <a:r>
+              <a:t/>
+            </a:r>
+          </a:p>
+          <a:p>
+            <a:r>
+              <a:t>EXPLAIN IN ORDINARY WORDS</a:t>
+            </a:r>
+          </a:p>
+          <a:p>
+            <a:r>
+              <a:t>A list keeps items in order. Python positions start at zero. In [2,4,6], position 0 contains 2 and position 2 contains 6. A slice excludes its stop position.</a:t>
+            </a:r>
+          </a:p>
+          <a:p>
+            <a:r>
+              <a:t/>
+            </a:r>
+          </a:p>
+          <a:p>
+            <a:r>
+              <a:t>CHECK AND EXPECTED ANSWER</a:t>
+            </a:r>
+          </a:p>
+          <a:p>
+            <a:r>
+              <a:t>What is [2,4,6][1]? 4. Is there a position 3? No.</a:t>
+            </a:r>
+          </a:p>
+          <a:p>
+            <a:r>
+              <a:t/>
+            </a:r>
+          </a:p>
+          <a:p>
+            <a:r>
+              <a:t>IF LEARNERS ARE STUCK</a:t>
+            </a:r>
+          </a:p>
+          <a:p>
+            <a:r>
+              <a:t>Draw three numbered boxes starting at zero. Keep the position separate from the value stored in it.</a:t>
+            </a:r>
+          </a:p>
+          <a:p>
+            <a:r>
+              <a:t/>
+            </a:r>
+          </a:p>
+          <a:p>
+            <a:r>
+              <a:t>NEXT</a:t>
+            </a:r>
+          </a:p>
+          <a:p>
+            <a:r>
+              <a:t>Everything in the left half, in fourteen lines. Move on after a learner can explain the current example or required action.</a:t>
             </a:r>
           </a:p>
         </p:txBody>
@@ -826,8 +1185,8 @@
 </p:notes>
 </file>
 
-<file path=ppt/notesSlides/notesSlide14.xml><?xml version="1.0" encoding="utf-8"?>
-<p:notes xmlns:a="http://schemas.openxmlformats.org/drawingml/2006/main" xmlns:p="http://schemas.openxmlformats.org/presentationml/2006/main" xmlns:r="http://schemas.openxmlformats.org/officeDocument/2006/relationships">
+<file path=ppt/notesSlides/notesSlide12.xml><?xml version="1.0" encoding="utf-8"?>
+<p:notes xmlns:a="http://schemas.openxmlformats.org/drawingml/2006/main" xmlns:p="http://schemas.openxmlformats.org/presentationml/2006/main">
   <p:cSld>
     <p:spTree>
       <p:nvGrpSpPr>
@@ -869,7 +1228,91 @@
         <p:txBody>
           <a:bodyPr/>
           <a:lstStyle/>
-          <a:p/>
+          <a:p>
+            <a:r>
+              <a:t>TEACHING PURPOSE</a:t>
+            </a:r>
+          </a:p>
+          <a:p>
+            <a:r>
+              <a:t>Everything in the left half, in fourteen lines</a:t>
+            </a:r>
+          </a:p>
+          <a:p>
+            <a:r>
+              <a:t/>
+            </a:r>
+          </a:p>
+          <a:p>
+            <a:r>
+              <a:t>CONNECT</a:t>
+            </a:r>
+          </a:p>
+          <a:p>
+            <a:r>
+              <a:t>Build on the preceding slide: Zero-based counting.</a:t>
+            </a:r>
+          </a:p>
+          <a:p>
+            <a:r>
+              <a:t/>
+            </a:r>
+          </a:p>
+          <a:p>
+            <a:r>
+              <a:t>EXPLAIN IN ORDINARY WORDS</a:t>
+            </a:r>
+          </a:p>
+          <a:p>
+            <a:r>
+              <a:t>A list keeps items in order. Python positions start at zero. In [2,4,6], position 0 contains 2 and position 2 contains 6. A slice excludes its stop position.</a:t>
+            </a:r>
+          </a:p>
+          <a:p>
+            <a:r>
+              <a:t/>
+            </a:r>
+          </a:p>
+          <a:p>
+            <a:r>
+              <a:t>CHECK AND EXPECTED ANSWER</a:t>
+            </a:r>
+          </a:p>
+          <a:p>
+            <a:r>
+              <a:t>What is [2,4,6][1]? 4. Is there a position 3? No.</a:t>
+            </a:r>
+          </a:p>
+          <a:p>
+            <a:r>
+              <a:t/>
+            </a:r>
+          </a:p>
+          <a:p>
+            <a:r>
+              <a:t>IF LEARNERS ARE STUCK</a:t>
+            </a:r>
+          </a:p>
+          <a:p>
+            <a:r>
+              <a:t>Draw three numbered boxes starting at zero. Keep the position separate from the value stored in it.</a:t>
+            </a:r>
+          </a:p>
+          <a:p>
+            <a:r>
+              <a:t/>
+            </a:r>
+          </a:p>
+          <a:p>
+            <a:r>
+              <a:t>NEXT</a:t>
+            </a:r>
+          </a:p>
+          <a:p>
+            <a:r>
+              <a:t>Break. Move on after a learner can explain the current example or required action.</a:t>
+            </a:r>
+          </a:p>
         </p:txBody>
       </p:sp>
       <p:sp>
@@ -892,8 +1335,8 @@
 </p:notes>
 </file>
 
-<file path=ppt/notesSlides/notesSlide15.xml><?xml version="1.0" encoding="utf-8"?>
-<p:notes xmlns:a="http://schemas.openxmlformats.org/drawingml/2006/main" xmlns:p="http://schemas.openxmlformats.org/presentationml/2006/main" xmlns:r="http://schemas.openxmlformats.org/officeDocument/2006/relationships">
+<file path=ppt/notesSlides/notesSlide13.xml><?xml version="1.0" encoding="utf-8"?>
+<p:notes xmlns:a="http://schemas.openxmlformats.org/drawingml/2006/main" xmlns:p="http://schemas.openxmlformats.org/presentationml/2006/main">
   <p:cSld>
     <p:spTree>
       <p:nvGrpSpPr>
@@ -935,7 +1378,61 @@
         <p:txBody>
           <a:bodyPr/>
           <a:lstStyle/>
-          <a:p/>
+          <a:p>
+            <a:r>
+              <a:t>TEACHING PURPOSE</a:t>
+            </a:r>
+          </a:p>
+          <a:p>
+            <a:r>
+              <a:t>Break</a:t>
+            </a:r>
+          </a:p>
+          <a:p>
+            <a:r>
+              <a:t/>
+            </a:r>
+          </a:p>
+          <a:p>
+            <a:r>
+              <a:t>CONNECT</a:t>
+            </a:r>
+          </a:p>
+          <a:p>
+            <a:r>
+              <a:t>Build on the preceding slide: Everything in the left half, in fourteen lines.</a:t>
+            </a:r>
+          </a:p>
+          <a:p>
+            <a:r>
+              <a:t/>
+            </a:r>
+          </a:p>
+          <a:p>
+            <a:r>
+              <a:t>LECTURER CUE</a:t>
+            </a:r>
+          </a:p>
+          <a:p>
+            <a:r>
+              <a:t>Ten minutes.</a:t>
+            </a:r>
+          </a:p>
+          <a:p>
+            <a:r>
+              <a:t/>
+            </a:r>
+          </a:p>
+          <a:p>
+            <a:r>
+              <a:t>NEXT</a:t>
+            </a:r>
+          </a:p>
+          <a:p>
+            <a:r>
+              <a:t>Your first DataFrame. Move on after a learner can explain the current example or required action.</a:t>
+            </a:r>
+          </a:p>
         </p:txBody>
       </p:sp>
       <p:sp>
@@ -958,8 +1455,8 @@
 </p:notes>
 </file>
 
-<file path=ppt/notesSlides/notesSlide16.xml><?xml version="1.0" encoding="utf-8"?>
-<p:notes xmlns:a="http://schemas.openxmlformats.org/drawingml/2006/main" xmlns:p="http://schemas.openxmlformats.org/presentationml/2006/main" xmlns:r="http://schemas.openxmlformats.org/officeDocument/2006/relationships">
+<file path=ppt/notesSlides/notesSlide14.xml><?xml version="1.0" encoding="utf-8"?>
+<p:notes xmlns:a="http://schemas.openxmlformats.org/drawingml/2006/main" xmlns:p="http://schemas.openxmlformats.org/presentationml/2006/main">
   <p:cSld>
     <p:spTree>
       <p:nvGrpSpPr>
@@ -1003,7 +1500,87 @@
           <a:lstStyle/>
           <a:p>
             <a:r>
-              <a:t>Copying code you cannot read. It works, you learn nothing, and the first time it breaks you are stuck. Type it.</a:t>
+              <a:t>TEACHING PURPOSE</a:t>
+            </a:r>
+          </a:p>
+          <a:p>
+            <a:r>
+              <a:t>Make three errors on purpose</a:t>
+            </a:r>
+          </a:p>
+          <a:p>
+            <a:r>
+              <a:t/>
+            </a:r>
+          </a:p>
+          <a:p>
+            <a:r>
+              <a:t>CONNECT</a:t>
+            </a:r>
+          </a:p>
+          <a:p>
+            <a:r>
+              <a:t>Build on the preceding slide: Your first DataFrame.</a:t>
+            </a:r>
+          </a:p>
+          <a:p>
+            <a:r>
+              <a:t/>
+            </a:r>
+          </a:p>
+          <a:p>
+            <a:r>
+              <a:t>EXPLAIN IN ORDINARY WORDS</a:t>
+            </a:r>
+          </a:p>
+          <a:p>
+            <a:r>
+              <a:t>A CSV is a text table. The header supplies column names. With csv.DictReader, values start as text, even if they look like numbers. A path tells Python where the file is.</a:t>
+            </a:r>
+          </a:p>
+          <a:p>
+            <a:r>
+              <a:t/>
+            </a:r>
+          </a:p>
+          <a:p>
+            <a:r>
+              <a:t>CHECK AND EXPECTED ANSWER</a:t>
+            </a:r>
+          </a:p>
+          <a:p>
+            <a:r>
+              <a:t>Can "2.5" from csv.DictReader be added as a number without conversion? No; convert valid numeric text first.</a:t>
+            </a:r>
+          </a:p>
+          <a:p>
+            <a:r>
+              <a:t/>
+            </a:r>
+          </a:p>
+          <a:p>
+            <a:r>
+              <a:t>IF LEARNERS ARE STUCK</a:t>
+            </a:r>
+          </a:p>
+          <a:p>
+            <a:r>
+              <a:t>Show the file in the runtime folder and compare its exact filename, case and column headers. Upload data again after a fresh Colab runtime.</a:t>
+            </a:r>
+          </a:p>
+          <a:p>
+            <a:r>
+              <a:t/>
+            </a:r>
+          </a:p>
+          <a:p>
+            <a:r>
+              <a:t>NEXT</a:t>
+            </a:r>
+          </a:p>
+          <a:p>
+            <a:r>
+              <a:t>Your first DataFrame. Move on after a learner can explain the current example or required action.</a:t>
             </a:r>
           </a:p>
         </p:txBody>
@@ -1028,8 +1605,8 @@
 </p:notes>
 </file>
 
-<file path=ppt/notesSlides/notesSlide17.xml><?xml version="1.0" encoding="utf-8"?>
-<p:notes xmlns:a="http://schemas.openxmlformats.org/drawingml/2006/main" xmlns:p="http://schemas.openxmlformats.org/presentationml/2006/main" xmlns:r="http://schemas.openxmlformats.org/officeDocument/2006/relationships">
+<file path=ppt/notesSlides/notesSlide15.xml><?xml version="1.0" encoding="utf-8"?>
+<p:notes xmlns:a="http://schemas.openxmlformats.org/drawingml/2006/main" xmlns:p="http://schemas.openxmlformats.org/presentationml/2006/main">
   <p:cSld>
     <p:spTree>
       <p:nvGrpSpPr>
@@ -1071,7 +1648,106 @@
         <p:txBody>
           <a:bodyPr/>
           <a:lstStyle/>
-          <a:p/>
+          <a:p>
+            <a:r>
+              <a:t>TEACHING PURPOSE</a:t>
+            </a:r>
+          </a:p>
+          <a:p>
+            <a:r>
+              <a:t>Your first DataFrame</a:t>
+            </a:r>
+          </a:p>
+          <a:p>
+            <a:r>
+              <a:t/>
+            </a:r>
+          </a:p>
+          <a:p>
+            <a:r>
+              <a:t>CONNECT</a:t>
+            </a:r>
+          </a:p>
+          <a:p>
+            <a:r>
+              <a:t>Build on the preceding slide: Make three errors on purpose.</a:t>
+            </a:r>
+          </a:p>
+          <a:p>
+            <a:r>
+              <a:t/>
+            </a:r>
+          </a:p>
+          <a:p>
+            <a:r>
+              <a:t>EXPLAIN IN ORDINARY WORDS</a:t>
+            </a:r>
+          </a:p>
+          <a:p>
+            <a:r>
+              <a:t>A DataFrame is a labelled table. A Series is a single labelled sequence, often one column. A dtype describes stored values, but the import may infer something unsuitable.</a:t>
+            </a:r>
+          </a:p>
+          <a:p>
+            <a:r>
+              <a:t/>
+            </a:r>
+          </a:p>
+          <a:p>
+            <a:r>
+              <a:t>CHECK AND EXPECTED ANSWER</a:t>
+            </a:r>
+          </a:p>
+          <a:p>
+            <a:r>
+              <a:t>Does a price that looks numeric prove the column is numeric? No. Inspect its dtype and troublesome values before conversion.</a:t>
+            </a:r>
+          </a:p>
+          <a:p>
+            <a:r>
+              <a:t/>
+            </a:r>
+          </a:p>
+          <a:p>
+            <a:r>
+              <a:t>IF LEARNERS ARE STUCK</a:t>
+            </a:r>
+          </a:p>
+          <a:p>
+            <a:r>
+              <a:t>Use head, shape and dtypes to locate the table, count rows/columns and inspect storage. Check units and missing values before calculating.</a:t>
+            </a:r>
+          </a:p>
+          <a:p>
+            <a:r>
+              <a:t/>
+            </a:r>
+          </a:p>
+          <a:p>
+            <a:r>
+              <a:t>TYPE NUANCE</a:t>
+            </a:r>
+          </a:p>
+          <a:p>
+            <a:r>
+              <a:t>An object dtype alone does not prove that a column contains bad numeric values; it can hold Python objects, including numbers. Inspect values and conversion results. Missing values may display as NaN, None, NaT or pandas NA depending on dtype.</a:t>
+            </a:r>
+          </a:p>
+          <a:p>
+            <a:r>
+              <a:t/>
+            </a:r>
+          </a:p>
+          <a:p>
+            <a:r>
+              <a:t>NEXT</a:t>
+            </a:r>
+          </a:p>
+          <a:p>
+            <a:r>
+              <a:t>Copying code you cannot read. It works, you learn nothing, and the first time it breaks you are stuck. Type it.. Move on after a learner can explain the current example or required action.</a:t>
+            </a:r>
+          </a:p>
         </p:txBody>
       </p:sp>
       <p:sp>
@@ -1094,8 +1770,8 @@
 </p:notes>
 </file>
 
-<file path=ppt/notesSlides/notesSlide18.xml><?xml version="1.0" encoding="utf-8"?>
-<p:notes xmlns:a="http://schemas.openxmlformats.org/drawingml/2006/main" xmlns:p="http://schemas.openxmlformats.org/presentationml/2006/main" xmlns:r="http://schemas.openxmlformats.org/officeDocument/2006/relationships">
+<file path=ppt/notesSlides/notesSlide16.xml><?xml version="1.0" encoding="utf-8"?>
+<p:notes xmlns:a="http://schemas.openxmlformats.org/drawingml/2006/main" xmlns:p="http://schemas.openxmlformats.org/presentationml/2006/main">
   <p:cSld>
     <p:spTree>
       <p:nvGrpSpPr>
@@ -1137,7 +1813,61 @@
         <p:txBody>
           <a:bodyPr/>
           <a:lstStyle/>
-          <a:p/>
+          <a:p>
+            <a:r>
+              <a:t>TEACHING PURPOSE</a:t>
+            </a:r>
+          </a:p>
+          <a:p>
+            <a:r>
+              <a:t>Copying code you cannot read. It works, you learn nothing, and the first time it breaks you are stuck. Type it.</a:t>
+            </a:r>
+          </a:p>
+          <a:p>
+            <a:r>
+              <a:t/>
+            </a:r>
+          </a:p>
+          <a:p>
+            <a:r>
+              <a:t>CONNECT</a:t>
+            </a:r>
+          </a:p>
+          <a:p>
+            <a:r>
+              <a:t>Build on the preceding slide: Your first DataFrame.</a:t>
+            </a:r>
+          </a:p>
+          <a:p>
+            <a:r>
+              <a:t/>
+            </a:r>
+          </a:p>
+          <a:p>
+            <a:r>
+              <a:t>LECTURER CUE</a:t>
+            </a:r>
+          </a:p>
+          <a:p>
+            <a:r>
+              <a:t>Copying code you cannot read. It works, you learn nothing, and the first time it breaks you are stuck. Type it.</a:t>
+            </a:r>
+          </a:p>
+          <a:p>
+            <a:r>
+              <a:t/>
+            </a:r>
+          </a:p>
+          <a:p>
+            <a:r>
+              <a:t>NEXT</a:t>
+            </a:r>
+          </a:p>
+          <a:p>
+            <a:r>
+              <a:t>Can you answer these?. Move on after a learner can explain the current example or required action.</a:t>
+            </a:r>
+          </a:p>
         </p:txBody>
       </p:sp>
       <p:sp>
@@ -1160,8 +1890,8 @@
 </p:notes>
 </file>
 
-<file path=ppt/notesSlides/notesSlide19.xml><?xml version="1.0" encoding="utf-8"?>
-<p:notes xmlns:a="http://schemas.openxmlformats.org/drawingml/2006/main" xmlns:p="http://schemas.openxmlformats.org/presentationml/2006/main" xmlns:r="http://schemas.openxmlformats.org/officeDocument/2006/relationships">
+<file path=ppt/notesSlides/notesSlide17.xml><?xml version="1.0" encoding="utf-8"?>
+<p:notes xmlns:a="http://schemas.openxmlformats.org/drawingml/2006/main" xmlns:p="http://schemas.openxmlformats.org/presentationml/2006/main">
   <p:cSld>
     <p:spTree>
       <p:nvGrpSpPr>
@@ -1205,7 +1935,157 @@
           <a:lstStyle/>
           <a:p>
             <a:r>
-              <a:t>Nothing is pasted tonight. Open an empty notebook and type every line. It is slower and it is the only version that teaches you anything.</a:t>
+              <a:t>TEACHING PURPOSE</a:t>
+            </a:r>
+          </a:p>
+          <a:p>
+            <a:r>
+              <a:t>Can you answer these?</a:t>
+            </a:r>
+          </a:p>
+          <a:p>
+            <a:r>
+              <a:t/>
+            </a:r>
+          </a:p>
+          <a:p>
+            <a:r>
+              <a:t>CONNECT</a:t>
+            </a:r>
+          </a:p>
+          <a:p>
+            <a:r>
+              <a:t>Build on the preceding slide: Copying code you cannot read. It works, you learn nothing, and the first time it breaks you are stuck. Type it..</a:t>
+            </a:r>
+          </a:p>
+          <a:p>
+            <a:r>
+              <a:t/>
+            </a:r>
+          </a:p>
+          <a:p>
+            <a:r>
+              <a:t>EXPLAIN IN ORDINARY WORDS</a:t>
+            </a:r>
+          </a:p>
+          <a:p>
+            <a:r>
+              <a:t>A value is a piece of information. A variable is a name referring to a value. In length_m = 5, Python evaluates the right side and binds that result to the name on the left.</a:t>
+            </a:r>
+          </a:p>
+          <a:p>
+            <a:r>
+              <a:t/>
+            </a:r>
+          </a:p>
+          <a:p>
+            <a:r>
+              <a:t>CHECK AND EXPECTED ANSWER</a:t>
+            </a:r>
+          </a:p>
+          <a:p>
+            <a:r>
+              <a:t>After x=3 then x=5, what does print(x) display? 5. The earlier value is not added automatically.</a:t>
+            </a:r>
+          </a:p>
+          <a:p>
+            <a:r>
+              <a:t/>
+            </a:r>
+          </a:p>
+          <a:p>
+            <a:r>
+              <a:t>IF LEARNERS ARE STUCK</a:t>
+            </a:r>
+          </a:p>
+          <a:p>
+            <a:r>
+              <a:t>Write the name on a card and the current value beside it. Distinguish number 3 from quoted text "3".</a:t>
+            </a:r>
+          </a:p>
+          <a:p>
+            <a:r>
+              <a:t/>
+            </a:r>
+          </a:p>
+          <a:p>
+            <a:r>
+              <a:t>DISCUSSION KEY FOR THIS SLIDE</a:t>
+            </a:r>
+          </a:p>
+          <a:p>
+            <a:r>
+              <a:t>ANSWERS</a:t>
+            </a:r>
+          </a:p>
+          <a:p>
+            <a:r>
+              <a:t>How did you do?</a:t>
+            </a:r>
+          </a:p>
+          <a:p>
+            <a:r>
+              <a:t>A</a:t>
+            </a:r>
+          </a:p>
+          <a:p>
+            <a:r>
+              <a:t>A variable, in your own words</a:t>
+            </a:r>
+          </a:p>
+          <a:p>
+            <a:r>
+              <a:t>A name that holds a value so you can use it again. Like naming a cell, except you pick the name and it can say what it means.</a:t>
+            </a:r>
+          </a:p>
+          <a:p>
+            <a:r>
+              <a:t>B</a:t>
+            </a:r>
+          </a:p>
+          <a:p>
+            <a:r>
+              <a:t>NameError on a name you thought you had</a:t>
+            </a:r>
+          </a:p>
+          <a:p>
+            <a:r>
+              <a:t>Read it literally: that name does not exist. Nine times in ten it is a typo, or a cell you have not run yet. Scroll up, find where you meant to create it, and run that cell.</a:t>
+            </a:r>
+          </a:p>
+          <a:p>
+            <a:r>
+              <a:t>C</a:t>
+            </a:r>
+          </a:p>
+          <a:p>
+            <a:r>
+              <a:t>Why regions[4] fails</a:t>
+            </a:r>
+          </a:p>
+          <a:p>
+            <a:r>
+              <a:t>Because counting starts at 0, so four items are numbered 0, 1, 2 and 3. There is no item 4. This is the one real difference from Excel and it catches everybody once.</a:t>
+            </a:r>
+          </a:p>
+          <a:p>
+            <a:r>
+              <a:t>Let learners attempt first; use this to explain the reasoning, not just reveal the answer.</a:t>
+            </a:r>
+          </a:p>
+          <a:p>
+            <a:r>
+              <a:t/>
+            </a:r>
+          </a:p>
+          <a:p>
+            <a:r>
+              <a:t>NEXT</a:t>
+            </a:r>
+          </a:p>
+          <a:p>
+            <a:r>
+              <a:t>How did you do?. Move on after a learner can explain the current example or required action.</a:t>
             </a:r>
           </a:p>
         </p:txBody>
@@ -1230,8 +2110,8 @@
 </p:notes>
 </file>
 
-<file path=ppt/notesSlides/notesSlide2.xml><?xml version="1.0" encoding="utf-8"?>
-<p:notes xmlns:a="http://schemas.openxmlformats.org/drawingml/2006/main" xmlns:p="http://schemas.openxmlformats.org/presentationml/2006/main" xmlns:r="http://schemas.openxmlformats.org/officeDocument/2006/relationships">
+<file path=ppt/notesSlides/notesSlide18.xml><?xml version="1.0" encoding="utf-8"?>
+<p:notes xmlns:a="http://schemas.openxmlformats.org/drawingml/2006/main" xmlns:p="http://schemas.openxmlformats.org/presentationml/2006/main">
   <p:cSld>
     <p:spTree>
       <p:nvGrpSpPr>
@@ -1275,7 +2155,87 @@
           <a:lstStyle/>
           <a:p>
             <a:r>
-              <a:t>Tonight is session 6 of twelve.</a:t>
+              <a:t>TEACHING PURPOSE</a:t>
+            </a:r>
+          </a:p>
+          <a:p>
+            <a:r>
+              <a:t>How did you do?</a:t>
+            </a:r>
+          </a:p>
+          <a:p>
+            <a:r>
+              <a:t/>
+            </a:r>
+          </a:p>
+          <a:p>
+            <a:r>
+              <a:t>CONNECT</a:t>
+            </a:r>
+          </a:p>
+          <a:p>
+            <a:r>
+              <a:t>Build on the preceding slide: Can you answer these?.</a:t>
+            </a:r>
+          </a:p>
+          <a:p>
+            <a:r>
+              <a:t/>
+            </a:r>
+          </a:p>
+          <a:p>
+            <a:r>
+              <a:t>EXPLAIN IN ORDINARY WORDS</a:t>
+            </a:r>
+          </a:p>
+          <a:p>
+            <a:r>
+              <a:t>A value is a piece of information. A variable is a name referring to a value. In length_m = 5, Python evaluates the right side and binds that result to the name on the left.</a:t>
+            </a:r>
+          </a:p>
+          <a:p>
+            <a:r>
+              <a:t/>
+            </a:r>
+          </a:p>
+          <a:p>
+            <a:r>
+              <a:t>CHECK AND EXPECTED ANSWER</a:t>
+            </a:r>
+          </a:p>
+          <a:p>
+            <a:r>
+              <a:t>After x=3 then x=5, what does print(x) display? 5. The earlier value is not added automatically.</a:t>
+            </a:r>
+          </a:p>
+          <a:p>
+            <a:r>
+              <a:t/>
+            </a:r>
+          </a:p>
+          <a:p>
+            <a:r>
+              <a:t>IF LEARNERS ARE STUCK</a:t>
+            </a:r>
+          </a:p>
+          <a:p>
+            <a:r>
+              <a:t>Write the name on a card and the current value beside it. Distinguish number 3 from quoted text "3".</a:t>
+            </a:r>
+          </a:p>
+          <a:p>
+            <a:r>
+              <a:t/>
+            </a:r>
+          </a:p>
+          <a:p>
+            <a:r>
+              <a:t>NEXT</a:t>
+            </a:r>
+          </a:p>
+          <a:p>
+            <a:r>
+              <a:t>Type it yourself, from a blank notebook. Move on after a learner can explain the current example or required action.</a:t>
             </a:r>
           </a:p>
         </p:txBody>
@@ -1300,8 +2260,8 @@
 </p:notes>
 </file>
 
-<file path=ppt/notesSlides/notesSlide20.xml><?xml version="1.0" encoding="utf-8"?>
-<p:notes xmlns:a="http://schemas.openxmlformats.org/drawingml/2006/main" xmlns:p="http://schemas.openxmlformats.org/presentationml/2006/main" xmlns:r="http://schemas.openxmlformats.org/officeDocument/2006/relationships">
+<file path=ppt/notesSlides/notesSlide19.xml><?xml version="1.0" encoding="utf-8"?>
+<p:notes xmlns:a="http://schemas.openxmlformats.org/drawingml/2006/main" xmlns:p="http://schemas.openxmlformats.org/presentationml/2006/main">
   <p:cSld>
     <p:spTree>
       <p:nvGrpSpPr>
@@ -1343,7 +2303,106 @@
         <p:txBody>
           <a:bodyPr/>
           <a:lstStyle/>
-          <a:p/>
+          <a:p>
+            <a:r>
+              <a:t>TEACHING PURPOSE</a:t>
+            </a:r>
+          </a:p>
+          <a:p>
+            <a:r>
+              <a:t>Type it yourself, from a blank notebook</a:t>
+            </a:r>
+          </a:p>
+          <a:p>
+            <a:r>
+              <a:t/>
+            </a:r>
+          </a:p>
+          <a:p>
+            <a:r>
+              <a:t>CONNECT</a:t>
+            </a:r>
+          </a:p>
+          <a:p>
+            <a:r>
+              <a:t>Build on the preceding slide: How did you do?.</a:t>
+            </a:r>
+          </a:p>
+          <a:p>
+            <a:r>
+              <a:t/>
+            </a:r>
+          </a:p>
+          <a:p>
+            <a:r>
+              <a:t>LECTURER CUE</a:t>
+            </a:r>
+          </a:p>
+          <a:p>
+            <a:r>
+              <a:t>Nothing is pasted tonight. Open an empty notebook and type every line. It is slower and it is the only version that teaches you anything.</a:t>
+            </a:r>
+          </a:p>
+          <a:p>
+            <a:r>
+              <a:t/>
+            </a:r>
+          </a:p>
+          <a:p>
+            <a:r>
+              <a:t>EXPLAIN IN ORDINARY WORDS</a:t>
+            </a:r>
+          </a:p>
+          <a:p>
+            <a:r>
+              <a:t>Missing means not recorded, not automatically zero. Decide why it is missing and document the rule. Fitted fill values must come from training data when evaluating a model.</a:t>
+            </a:r>
+          </a:p>
+          <a:p>
+            <a:r>
+              <a:t/>
+            </a:r>
+          </a:p>
+          <a:p>
+            <a:r>
+              <a:t>CHECK AND EXPECTED ANSWER</a:t>
+            </a:r>
+          </a:p>
+          <a:p>
+            <a:r>
+              <a:t>Is an unrecorded energy reading evidence of zero consumption? No.</a:t>
+            </a:r>
+          </a:p>
+          <a:p>
+            <a:r>
+              <a:t/>
+            </a:r>
+          </a:p>
+          <a:p>
+            <a:r>
+              <a:t>IF LEARNERS ARE STUCK</a:t>
+            </a:r>
+          </a:p>
+          <a:p>
+            <a:r>
+              <a:t>Use three rows: a recorded zero, a recorded positive value and a blank. Explain their different meanings before cleaning.</a:t>
+            </a:r>
+          </a:p>
+          <a:p>
+            <a:r>
+              <a:t/>
+            </a:r>
+          </a:p>
+          <a:p>
+            <a:r>
+              <a:t>NEXT</a:t>
+            </a:r>
+          </a:p>
+          <a:p>
+            <a:r>
+              <a:t>What you can do now. Move on after a learner can explain the current example or required action.</a:t>
+            </a:r>
+          </a:p>
         </p:txBody>
       </p:sp>
       <p:sp>
@@ -1366,8 +2425,8 @@
 </p:notes>
 </file>
 
-<file path=ppt/notesSlides/notesSlide21.xml><?xml version="1.0" encoding="utf-8"?>
-<p:notes xmlns:a="http://schemas.openxmlformats.org/drawingml/2006/main" xmlns:p="http://schemas.openxmlformats.org/presentationml/2006/main" xmlns:r="http://schemas.openxmlformats.org/officeDocument/2006/relationships">
+<file path=ppt/notesSlides/notesSlide2.xml><?xml version="1.0" encoding="utf-8"?>
+<p:notes xmlns:a="http://schemas.openxmlformats.org/drawingml/2006/main" xmlns:p="http://schemas.openxmlformats.org/presentationml/2006/main">
   <p:cSld>
     <p:spTree>
       <p:nvGrpSpPr>
@@ -1411,7 +2470,102 @@
           <a:lstStyle/>
           <a:p>
             <a:r>
-              <a:t>Retype tonight's notebook from scratch without looking. It takes fifteen minutes and it is worth more than an hour of reading.</a:t>
+              <a:t>TEACHING PURPOSE</a:t>
+            </a:r>
+          </a:p>
+          <a:p>
+            <a:r>
+              <a:t>Where tonight sits</a:t>
+            </a:r>
+          </a:p>
+          <a:p>
+            <a:r>
+              <a:t/>
+            </a:r>
+          </a:p>
+          <a:p>
+            <a:r>
+              <a:t>CONNECT</a:t>
+            </a:r>
+          </a:p>
+          <a:p>
+            <a:r>
+              <a:t>Build on the preceding slide: Your first program.</a:t>
+            </a:r>
+          </a:p>
+          <a:p>
+            <a:r>
+              <a:t/>
+            </a:r>
+          </a:p>
+          <a:p>
+            <a:r>
+              <a:t>LECTURER CUE</a:t>
+            </a:r>
+          </a:p>
+          <a:p>
+            <a:r>
+              <a:t>Tonight is session 6 of fifteen.</a:t>
+            </a:r>
+          </a:p>
+          <a:p>
+            <a:r>
+              <a:t/>
+            </a:r>
+          </a:p>
+          <a:p>
+            <a:r>
+              <a:t>EXPLAIN IN ORDINARY WORDS</a:t>
+            </a:r>
+          </a:p>
+          <a:p>
+            <a:r>
+              <a:t>Grain means what one row represents. A key identifies a row; a primary key may use more than one column. A join matches keys, and multiple matches can multiply rows.</a:t>
+            </a:r>
+          </a:p>
+          <a:p>
+            <a:r>
+              <a:t/>
+            </a:r>
+          </a:p>
+          <a:p>
+            <a:r>
+              <a:t>CHECK AND EXPECTED ANSWER</a:t>
+            </a:r>
+          </a:p>
+          <a:p>
+            <a:r>
+              <a:t>One order has two lines. After joining orders to lines, how many rows for it? Two. Summing a repeated order-level total would double-count.</a:t>
+            </a:r>
+          </a:p>
+          <a:p>
+            <a:r>
+              <a:t/>
+            </a:r>
+          </a:p>
+          <a:p>
+            <a:r>
+              <a:t>IF LEARNERS ARE STUCK</a:t>
+            </a:r>
+          </a:p>
+          <a:p>
+            <a:r>
+              <a:t>Write one example row from each table. Circle keys and trace each match. Aggregate to the intended grain and check counts and totals.</a:t>
+            </a:r>
+          </a:p>
+          <a:p>
+            <a:r>
+              <a:t/>
+            </a:r>
+          </a:p>
+          <a:p>
+            <a:r>
+              <a:t>NEXT</a:t>
+            </a:r>
+          </a:p>
+          <a:p>
+            <a:r>
+              <a:t>The words for tonight. Move on after a learner can explain the current example or required action.</a:t>
             </a:r>
           </a:p>
         </p:txBody>
@@ -1436,8 +2590,8 @@
 </p:notes>
 </file>
 
-<file path=ppt/notesSlides/notesSlide22.xml><?xml version="1.0" encoding="utf-8"?>
-<p:notes xmlns:a="http://schemas.openxmlformats.org/drawingml/2006/main" xmlns:p="http://schemas.openxmlformats.org/presentationml/2006/main" xmlns:r="http://schemas.openxmlformats.org/officeDocument/2006/relationships">
+<file path=ppt/notesSlides/notesSlide20.xml><?xml version="1.0" encoding="utf-8"?>
+<p:notes xmlns:a="http://schemas.openxmlformats.org/drawingml/2006/main" xmlns:p="http://schemas.openxmlformats.org/presentationml/2006/main">
   <p:cSld>
     <p:spTree>
       <p:nvGrpSpPr>
@@ -1481,7 +2635,87 @@
           <a:lstStyle/>
           <a:p>
             <a:r>
-              <a:t>It loaded a real file of 6,000 rows and told you something true about it. The rest of this course is more of the same, in bigger steps.</a:t>
+              <a:t>TEACHING PURPOSE</a:t>
+            </a:r>
+          </a:p>
+          <a:p>
+            <a:r>
+              <a:t>What you can do now</a:t>
+            </a:r>
+          </a:p>
+          <a:p>
+            <a:r>
+              <a:t/>
+            </a:r>
+          </a:p>
+          <a:p>
+            <a:r>
+              <a:t>CONNECT</a:t>
+            </a:r>
+          </a:p>
+          <a:p>
+            <a:r>
+              <a:t>Build on the preceding slide: Type it yourself, from a blank notebook.</a:t>
+            </a:r>
+          </a:p>
+          <a:p>
+            <a:r>
+              <a:t/>
+            </a:r>
+          </a:p>
+          <a:p>
+            <a:r>
+              <a:t>EXPLAIN IN ORDINARY WORDS</a:t>
+            </a:r>
+          </a:p>
+          <a:p>
+            <a:r>
+              <a:t>A DataFrame is a labelled table. A Series is a single labelled sequence, often one column. A dtype describes stored values, but the import may infer something unsuitable.</a:t>
+            </a:r>
+          </a:p>
+          <a:p>
+            <a:r>
+              <a:t/>
+            </a:r>
+          </a:p>
+          <a:p>
+            <a:r>
+              <a:t>CHECK AND EXPECTED ANSWER</a:t>
+            </a:r>
+          </a:p>
+          <a:p>
+            <a:r>
+              <a:t>Does a price that looks numeric prove the column is numeric? No. Inspect its dtype and troublesome values before conversion.</a:t>
+            </a:r>
+          </a:p>
+          <a:p>
+            <a:r>
+              <a:t/>
+            </a:r>
+          </a:p>
+          <a:p>
+            <a:r>
+              <a:t>IF LEARNERS ARE STUCK</a:t>
+            </a:r>
+          </a:p>
+          <a:p>
+            <a:r>
+              <a:t>Use head, shape and dtypes to locate the table, count rows/columns and inspect storage. Check units and missing values before calculating.</a:t>
+            </a:r>
+          </a:p>
+          <a:p>
+            <a:r>
+              <a:t/>
+            </a:r>
+          </a:p>
+          <a:p>
+            <a:r>
+              <a:t>NEXT</a:t>
+            </a:r>
+          </a:p>
+          <a:p>
+            <a:r>
+              <a:t>Before the next session. Move on after a learner can explain the current example or required action.</a:t>
             </a:r>
           </a:p>
         </p:txBody>
@@ -1506,8 +2740,8 @@
 </p:notes>
 </file>
 
-<file path=ppt/notesSlides/notesSlide3.xml><?xml version="1.0" encoding="utf-8"?>
-<p:notes xmlns:a="http://schemas.openxmlformats.org/drawingml/2006/main" xmlns:p="http://schemas.openxmlformats.org/presentationml/2006/main" xmlns:r="http://schemas.openxmlformats.org/officeDocument/2006/relationships">
+<file path=ppt/notesSlides/notesSlide21.xml><?xml version="1.0" encoding="utf-8"?>
+<p:notes xmlns:a="http://schemas.openxmlformats.org/drawingml/2006/main" xmlns:p="http://schemas.openxmlformats.org/presentationml/2006/main">
   <p:cSld>
     <p:spTree>
       <p:nvGrpSpPr>
@@ -1549,7 +2783,106 @@
         <p:txBody>
           <a:bodyPr/>
           <a:lstStyle/>
-          <a:p/>
+          <a:p>
+            <a:r>
+              <a:t>TEACHING PURPOSE</a:t>
+            </a:r>
+          </a:p>
+          <a:p>
+            <a:r>
+              <a:t>Before the next session</a:t>
+            </a:r>
+          </a:p>
+          <a:p>
+            <a:r>
+              <a:t/>
+            </a:r>
+          </a:p>
+          <a:p>
+            <a:r>
+              <a:t>CONNECT</a:t>
+            </a:r>
+          </a:p>
+          <a:p>
+            <a:r>
+              <a:t>Build on the preceding slide: What you can do now.</a:t>
+            </a:r>
+          </a:p>
+          <a:p>
+            <a:r>
+              <a:t/>
+            </a:r>
+          </a:p>
+          <a:p>
+            <a:r>
+              <a:t>LECTURER CUE</a:t>
+            </a:r>
+          </a:p>
+          <a:p>
+            <a:r>
+              <a:t>Retype tonight's notebook from scratch without looking. It takes fifteen minutes and it is worth more than an hour of reading.</a:t>
+            </a:r>
+          </a:p>
+          <a:p>
+            <a:r>
+              <a:t/>
+            </a:r>
+          </a:p>
+          <a:p>
+            <a:r>
+              <a:t>EXPLAIN IN ORDINARY WORDS</a:t>
+            </a:r>
+          </a:p>
+          <a:p>
+            <a:r>
+              <a:t>A notebook contains code cells and explanatory text cells. The runtime remembers values from cells that actually ran, which may differ from their visual order.</a:t>
+            </a:r>
+          </a:p>
+          <a:p>
+            <a:r>
+              <a:t/>
+            </a:r>
+          </a:p>
+          <a:p>
+            <a:r>
+              <a:t>CHECK AND EXPECTED ANSWER</a:t>
+            </a:r>
+          </a:p>
+          <a:p>
+            <a:r>
+              <a:t>Does editing a cell update a value already stored in memory? No; the cell must run.</a:t>
+            </a:r>
+          </a:p>
+          <a:p>
+            <a:r>
+              <a:t/>
+            </a:r>
+          </a:p>
+          <a:p>
+            <a:r>
+              <a:t>IF LEARNERS ARE STUCK</a:t>
+            </a:r>
+          </a:p>
+          <a:p>
+            <a:r>
+              <a:t>Outside an assessment restriction, restart and run from the top after loading data. Fix the first error before later cells; save the successful notebook.</a:t>
+            </a:r>
+          </a:p>
+          <a:p>
+            <a:r>
+              <a:t/>
+            </a:r>
+          </a:p>
+          <a:p>
+            <a:r>
+              <a:t>NEXT</a:t>
+            </a:r>
+          </a:p>
+          <a:p>
+            <a:r>
+              <a:t>You wrote a program tonight. Move on after a learner can explain the current example or required action.</a:t>
+            </a:r>
+          </a:p>
         </p:txBody>
       </p:sp>
       <p:sp>
@@ -1572,8 +2905,8 @@
 </p:notes>
 </file>
 
-<file path=ppt/notesSlides/notesSlide4.xml><?xml version="1.0" encoding="utf-8"?>
-<p:notes xmlns:a="http://schemas.openxmlformats.org/drawingml/2006/main" xmlns:p="http://schemas.openxmlformats.org/presentationml/2006/main" xmlns:r="http://schemas.openxmlformats.org/officeDocument/2006/relationships">
+<file path=ppt/notesSlides/notesSlide22.xml><?xml version="1.0" encoding="utf-8"?>
+<p:notes xmlns:a="http://schemas.openxmlformats.org/drawingml/2006/main" xmlns:p="http://schemas.openxmlformats.org/presentationml/2006/main">
   <p:cSld>
     <p:spTree>
       <p:nvGrpSpPr>
@@ -1617,7 +2950,42 @@
           <a:lstStyle/>
           <a:p>
             <a:r>
-              <a:t>These three are what tonight is marked against, in the sense that the lab checks them.</a:t>
+              <a:t>TEACHING PURPOSE</a:t>
+            </a:r>
+          </a:p>
+          <a:p>
+            <a:r>
+              <a:t>You wrote a program tonight</a:t>
+            </a:r>
+          </a:p>
+          <a:p>
+            <a:r>
+              <a:t/>
+            </a:r>
+          </a:p>
+          <a:p>
+            <a:r>
+              <a:t>CONNECT</a:t>
+            </a:r>
+          </a:p>
+          <a:p>
+            <a:r>
+              <a:t>Build on the preceding slide: Before the next session.</a:t>
+            </a:r>
+          </a:p>
+          <a:p>
+            <a:r>
+              <a:t/>
+            </a:r>
+          </a:p>
+          <a:p>
+            <a:r>
+              <a:t>LECTURER CUE</a:t>
+            </a:r>
+          </a:p>
+          <a:p>
+            <a:r>
+              <a:t>It loaded a real file of 6,000 rows and told you something true about it. The rest of this course is more of the same, in bigger steps.</a:t>
             </a:r>
           </a:p>
         </p:txBody>
@@ -1642,8 +3010,8 @@
 </p:notes>
 </file>
 
-<file path=ppt/notesSlides/notesSlide5.xml><?xml version="1.0" encoding="utf-8"?>
-<p:notes xmlns:a="http://schemas.openxmlformats.org/drawingml/2006/main" xmlns:p="http://schemas.openxmlformats.org/presentationml/2006/main" xmlns:r="http://schemas.openxmlformats.org/officeDocument/2006/relationships">
+<file path=ppt/notesSlides/notesSlide3.xml><?xml version="1.0" encoding="utf-8"?>
+<p:notes xmlns:a="http://schemas.openxmlformats.org/drawingml/2006/main" xmlns:p="http://schemas.openxmlformats.org/presentationml/2006/main">
   <p:cSld>
     <p:spTree>
       <p:nvGrpSpPr>
@@ -1687,7 +3055,87 @@
           <a:lstStyle/>
           <a:p>
             <a:r>
-              <a:t>About ninety minutes. Tonight you load a real file and print how many rows it has.</a:t>
+              <a:t>TEACHING PURPOSE</a:t>
+            </a:r>
+          </a:p>
+          <a:p>
+            <a:r>
+              <a:t>The words for tonight</a:t>
+            </a:r>
+          </a:p>
+          <a:p>
+            <a:r>
+              <a:t/>
+            </a:r>
+          </a:p>
+          <a:p>
+            <a:r>
+              <a:t>CONNECT</a:t>
+            </a:r>
+          </a:p>
+          <a:p>
+            <a:r>
+              <a:t>Build on the preceding slide: Where tonight sits.</a:t>
+            </a:r>
+          </a:p>
+          <a:p>
+            <a:r>
+              <a:t/>
+            </a:r>
+          </a:p>
+          <a:p>
+            <a:r>
+              <a:t>EXPLAIN IN ORDINARY WORDS</a:t>
+            </a:r>
+          </a:p>
+          <a:p>
+            <a:r>
+              <a:t>A DataFrame is a labelled table. A Series is a single labelled sequence, often one column. A dtype describes stored values, but the import may infer something unsuitable.</a:t>
+            </a:r>
+          </a:p>
+          <a:p>
+            <a:r>
+              <a:t/>
+            </a:r>
+          </a:p>
+          <a:p>
+            <a:r>
+              <a:t>CHECK AND EXPECTED ANSWER</a:t>
+            </a:r>
+          </a:p>
+          <a:p>
+            <a:r>
+              <a:t>Does a price that looks numeric prove the column is numeric? No. Inspect its dtype and troublesome values before conversion.</a:t>
+            </a:r>
+          </a:p>
+          <a:p>
+            <a:r>
+              <a:t/>
+            </a:r>
+          </a:p>
+          <a:p>
+            <a:r>
+              <a:t>IF LEARNERS ARE STUCK</a:t>
+            </a:r>
+          </a:p>
+          <a:p>
+            <a:r>
+              <a:t>Use head, shape and dtypes to locate the table, count rows/columns and inspect storage. Check units and missing values before calculating.</a:t>
+            </a:r>
+          </a:p>
+          <a:p>
+            <a:r>
+              <a:t/>
+            </a:r>
+          </a:p>
+          <a:p>
+            <a:r>
+              <a:t>NEXT</a:t>
+            </a:r>
+          </a:p>
+          <a:p>
+            <a:r>
+              <a:t>By the end of tonight you can…. Move on after a learner can explain the current example or required action.</a:t>
             </a:r>
           </a:p>
         </p:txBody>
@@ -1712,8 +3160,8 @@
 </p:notes>
 </file>
 
-<file path=ppt/notesSlides/notesSlide6.xml><?xml version="1.0" encoding="utf-8"?>
-<p:notes xmlns:a="http://schemas.openxmlformats.org/drawingml/2006/main" xmlns:p="http://schemas.openxmlformats.org/presentationml/2006/main" xmlns:r="http://schemas.openxmlformats.org/officeDocument/2006/relationships">
+<file path=ppt/notesSlides/notesSlide4.xml><?xml version="1.0" encoding="utf-8"?>
+<p:notes xmlns:a="http://schemas.openxmlformats.org/drawingml/2006/main" xmlns:p="http://schemas.openxmlformats.org/presentationml/2006/main">
   <p:cSld>
     <p:spTree>
       <p:nvGrpSpPr>
@@ -1755,7 +3203,106 @@
         <p:txBody>
           <a:bodyPr/>
           <a:lstStyle/>
-          <a:p/>
+          <a:p>
+            <a:r>
+              <a:t>TEACHING PURPOSE</a:t>
+            </a:r>
+          </a:p>
+          <a:p>
+            <a:r>
+              <a:t>By the end of tonight you can…</a:t>
+            </a:r>
+          </a:p>
+          <a:p>
+            <a:r>
+              <a:t/>
+            </a:r>
+          </a:p>
+          <a:p>
+            <a:r>
+              <a:t>CONNECT</a:t>
+            </a:r>
+          </a:p>
+          <a:p>
+            <a:r>
+              <a:t>Build on the preceding slide: The words for tonight.</a:t>
+            </a:r>
+          </a:p>
+          <a:p>
+            <a:r>
+              <a:t/>
+            </a:r>
+          </a:p>
+          <a:p>
+            <a:r>
+              <a:t>LECTURER CUE</a:t>
+            </a:r>
+          </a:p>
+          <a:p>
+            <a:r>
+              <a:t>These three are what tonight is marked against, in the sense that the lab checks them.</a:t>
+            </a:r>
+          </a:p>
+          <a:p>
+            <a:r>
+              <a:t/>
+            </a:r>
+          </a:p>
+          <a:p>
+            <a:r>
+              <a:t>EXPLAIN IN ORDINARY WORDS</a:t>
+            </a:r>
+          </a:p>
+          <a:p>
+            <a:r>
+              <a:t>A DataFrame is a labelled table. A Series is a single labelled sequence, often one column. A dtype describes stored values, but the import may infer something unsuitable.</a:t>
+            </a:r>
+          </a:p>
+          <a:p>
+            <a:r>
+              <a:t/>
+            </a:r>
+          </a:p>
+          <a:p>
+            <a:r>
+              <a:t>CHECK AND EXPECTED ANSWER</a:t>
+            </a:r>
+          </a:p>
+          <a:p>
+            <a:r>
+              <a:t>Does a price that looks numeric prove the column is numeric? No. Inspect its dtype and troublesome values before conversion.</a:t>
+            </a:r>
+          </a:p>
+          <a:p>
+            <a:r>
+              <a:t/>
+            </a:r>
+          </a:p>
+          <a:p>
+            <a:r>
+              <a:t>IF LEARNERS ARE STUCK</a:t>
+            </a:r>
+          </a:p>
+          <a:p>
+            <a:r>
+              <a:t>Use head, shape and dtypes to locate the table, count rows/columns and inspect storage. Check units and missing values before calculating.</a:t>
+            </a:r>
+          </a:p>
+          <a:p>
+            <a:r>
+              <a:t/>
+            </a:r>
+          </a:p>
+          <a:p>
+            <a:r>
+              <a:t>NEXT</a:t>
+            </a:r>
+          </a:p>
+          <a:p>
+            <a:r>
+              <a:t>You have never programmed.. Move on after a learner can explain the current example or required action.</a:t>
+            </a:r>
+          </a:p>
         </p:txBody>
       </p:sp>
       <p:sp>
@@ -1778,8 +3325,8 @@
 </p:notes>
 </file>
 
-<file path=ppt/notesSlides/notesSlide7.xml><?xml version="1.0" encoding="utf-8"?>
-<p:notes xmlns:a="http://schemas.openxmlformats.org/drawingml/2006/main" xmlns:p="http://schemas.openxmlformats.org/presentationml/2006/main" xmlns:r="http://schemas.openxmlformats.org/officeDocument/2006/relationships">
+<file path=ppt/notesSlides/notesSlide5.xml><?xml version="1.0" encoding="utf-8"?>
+<p:notes xmlns:a="http://schemas.openxmlformats.org/drawingml/2006/main" xmlns:p="http://schemas.openxmlformats.org/presentationml/2006/main">
   <p:cSld>
     <p:spTree>
       <p:nvGrpSpPr>
@@ -1823,7 +3370,102 @@
           <a:lstStyle/>
           <a:p>
             <a:r>
-              <a:t>A name that holds a value, so you can use it again without retyping it. You choose the name.</a:t>
+              <a:t>TEACHING PURPOSE</a:t>
+            </a:r>
+          </a:p>
+          <a:p>
+            <a:r>
+              <a:t>You have never programmed.</a:t>
+            </a:r>
+          </a:p>
+          <a:p>
+            <a:r>
+              <a:t/>
+            </a:r>
+          </a:p>
+          <a:p>
+            <a:r>
+              <a:t>CONNECT</a:t>
+            </a:r>
+          </a:p>
+          <a:p>
+            <a:r>
+              <a:t>Build on the preceding slide: By the end of tonight you can….</a:t>
+            </a:r>
+          </a:p>
+          <a:p>
+            <a:r>
+              <a:t/>
+            </a:r>
+          </a:p>
+          <a:p>
+            <a:r>
+              <a:t>LECTURER CUE</a:t>
+            </a:r>
+          </a:p>
+          <a:p>
+            <a:r>
+              <a:t>About ninety minutes. Tonight you load a real file and print how many rows it has.</a:t>
+            </a:r>
+          </a:p>
+          <a:p>
+            <a:r>
+              <a:t/>
+            </a:r>
+          </a:p>
+          <a:p>
+            <a:r>
+              <a:t>EXPLAIN IN ORDINARY WORDS</a:t>
+            </a:r>
+          </a:p>
+          <a:p>
+            <a:r>
+              <a:t>An observation describes the data. A finding answers a defined question with evidence. A recommendation adds an action, its justification and limits.</a:t>
+            </a:r>
+          </a:p>
+          <a:p>
+            <a:r>
+              <a:t/>
+            </a:r>
+          </a:p>
+          <a:p>
+            <a:r>
+              <a:t>CHECK AND EXPECTED ANSWER</a:t>
+            </a:r>
+          </a:p>
+          <a:p>
+            <a:r>
+              <a:t>Does a difference between two groups prove one caused the other? No. Other differences or selection may explain it.</a:t>
+            </a:r>
+          </a:p>
+          <a:p>
+            <a:r>
+              <a:t/>
+            </a:r>
+          </a:p>
+          <a:p>
+            <a:r>
+              <a:t>IF LEARNERS ARE STUCK</a:t>
+            </a:r>
+          </a:p>
+          <a:p>
+            <a:r>
+              <a:t>Ask for the population, time period, number and comparison. Then ask what additional evidence could change the recommendation.</a:t>
+            </a:r>
+          </a:p>
+          <a:p>
+            <a:r>
+              <a:t/>
+            </a:r>
+          </a:p>
+          <a:p>
+            <a:r>
+              <a:t>NEXT</a:t>
+            </a:r>
+          </a:p>
+          <a:p>
+            <a:r>
+              <a:t>You already write code. Move on after a learner can explain the current example or required action.</a:t>
             </a:r>
           </a:p>
         </p:txBody>
@@ -1848,8 +3490,8 @@
 </p:notes>
 </file>
 
-<file path=ppt/notesSlides/notesSlide8.xml><?xml version="1.0" encoding="utf-8"?>
-<p:notes xmlns:a="http://schemas.openxmlformats.org/drawingml/2006/main" xmlns:p="http://schemas.openxmlformats.org/presentationml/2006/main" xmlns:r="http://schemas.openxmlformats.org/officeDocument/2006/relationships">
+<file path=ppt/notesSlides/notesSlide6.xml><?xml version="1.0" encoding="utf-8"?>
+<p:notes xmlns:a="http://schemas.openxmlformats.org/drawingml/2006/main" xmlns:p="http://schemas.openxmlformats.org/presentationml/2006/main">
   <p:cSld>
     <p:spTree>
       <p:nvGrpSpPr>
@@ -1893,7 +3535,87 @@
           <a:lstStyle/>
           <a:p>
             <a:r>
-              <a:t>A named instruction that takes inputs, does something, and gives back a result. You use other people's and you write your own.</a:t>
+              <a:t>TEACHING PURPOSE</a:t>
+            </a:r>
+          </a:p>
+          <a:p>
+            <a:r>
+              <a:t>A spreadsheet formula, with the parts named</a:t>
+            </a:r>
+          </a:p>
+          <a:p>
+            <a:r>
+              <a:t/>
+            </a:r>
+          </a:p>
+          <a:p>
+            <a:r>
+              <a:t>CONNECT</a:t>
+            </a:r>
+          </a:p>
+          <a:p>
+            <a:r>
+              <a:t>Build on the preceding slide: You already write code.</a:t>
+            </a:r>
+          </a:p>
+          <a:p>
+            <a:r>
+              <a:t/>
+            </a:r>
+          </a:p>
+          <a:p>
+            <a:r>
+              <a:t>EXPLAIN IN ORDINARY WORDS</a:t>
+            </a:r>
+          </a:p>
+          <a:p>
+            <a:r>
+              <a:t>A function is a named set of instructions. def defines it; a call runs it with inputs. Parameters are input names, arguments are supplied values, and return sends the result back.</a:t>
+            </a:r>
+          </a:p>
+          <a:p>
+            <a:r>
+              <a:t/>
+            </a:r>
+          </a:p>
+          <a:p>
+            <a:r>
+              <a:t>CHECK AND EXPECTED ANSWER</a:t>
+            </a:r>
+          </a:p>
+          <a:p>
+            <a:r>
+              <a:t>Does print(8) return the number 8 to the caller? No; it displays 8 and returns None. A function needing a numeric result should return it.</a:t>
+            </a:r>
+          </a:p>
+          <a:p>
+            <a:r>
+              <a:t/>
+            </a:r>
+          </a:p>
+          <a:p>
+            <a:r>
+              <a:t>IF LEARNERS ARE STUCK</a:t>
+            </a:r>
+          </a:p>
+          <a:p>
+            <a:r>
+              <a:t>Trace one call: bind input names, run the indented body, reach return, then put the returned result back into the calling expression.</a:t>
+            </a:r>
+          </a:p>
+          <a:p>
+            <a:r>
+              <a:t/>
+            </a:r>
+          </a:p>
+          <a:p>
+            <a:r>
+              <a:t>NEXT</a:t>
+            </a:r>
+          </a:p>
+          <a:p>
+            <a:r>
+              <a:t>Variable. Move on after a learner can explain the current example or required action.</a:t>
             </a:r>
           </a:p>
         </p:txBody>
@@ -1918,8 +3640,8 @@
 </p:notes>
 </file>
 
-<file path=ppt/notesSlides/notesSlide9.xml><?xml version="1.0" encoding="utf-8"?>
-<p:notes xmlns:a="http://schemas.openxmlformats.org/drawingml/2006/main" xmlns:p="http://schemas.openxmlformats.org/presentationml/2006/main" xmlns:r="http://schemas.openxmlformats.org/officeDocument/2006/relationships">
+<file path=ppt/notesSlides/notesSlide7.xml><?xml version="1.0" encoding="utf-8"?>
+<p:notes xmlns:a="http://schemas.openxmlformats.org/drawingml/2006/main" xmlns:p="http://schemas.openxmlformats.org/presentationml/2006/main">
   <p:cSld>
     <p:spTree>
       <p:nvGrpSpPr>
@@ -1963,7 +3685,432 @@
           <a:lstStyle/>
           <a:p>
             <a:r>
+              <a:t>TEACHING PURPOSE</a:t>
+            </a:r>
+          </a:p>
+          <a:p>
+            <a:r>
+              <a:t>Variable</a:t>
+            </a:r>
+          </a:p>
+          <a:p>
+            <a:r>
+              <a:t/>
+            </a:r>
+          </a:p>
+          <a:p>
+            <a:r>
+              <a:t>CONNECT</a:t>
+            </a:r>
+          </a:p>
+          <a:p>
+            <a:r>
+              <a:t>Build on the preceding slide: A spreadsheet formula, with the parts named.</a:t>
+            </a:r>
+          </a:p>
+          <a:p>
+            <a:r>
+              <a:t/>
+            </a:r>
+          </a:p>
+          <a:p>
+            <a:r>
+              <a:t>LECTURER CUE</a:t>
+            </a:r>
+          </a:p>
+          <a:p>
+            <a:r>
+              <a:t>A name that holds a value, so you can use it again without retyping it. You choose the name.</a:t>
+            </a:r>
+          </a:p>
+          <a:p>
+            <a:r>
+              <a:t/>
+            </a:r>
+          </a:p>
+          <a:p>
+            <a:r>
+              <a:t>EXPLAIN IN ORDINARY WORDS</a:t>
+            </a:r>
+          </a:p>
+          <a:p>
+            <a:r>
+              <a:t>A value is a piece of information. A variable is a name referring to a value. In length_m = 5, Python evaluates the right side and binds that result to the name on the left.</a:t>
+            </a:r>
+          </a:p>
+          <a:p>
+            <a:r>
+              <a:t/>
+            </a:r>
+          </a:p>
+          <a:p>
+            <a:r>
+              <a:t>CHECK AND EXPECTED ANSWER</a:t>
+            </a:r>
+          </a:p>
+          <a:p>
+            <a:r>
+              <a:t>After x=3 then x=5, what does print(x) display? 5. The earlier value is not added automatically.</a:t>
+            </a:r>
+          </a:p>
+          <a:p>
+            <a:r>
+              <a:t/>
+            </a:r>
+          </a:p>
+          <a:p>
+            <a:r>
+              <a:t>IF LEARNERS ARE STUCK</a:t>
+            </a:r>
+          </a:p>
+          <a:p>
+            <a:r>
+              <a:t>Write the name on a card and the current value beside it. Distinguish number 3 from quoted text "3".</a:t>
+            </a:r>
+          </a:p>
+          <a:p>
+            <a:r>
+              <a:t/>
+            </a:r>
+          </a:p>
+          <a:p>
+            <a:r>
+              <a:t>NEXT</a:t>
+            </a:r>
+          </a:p>
+          <a:p>
+            <a:r>
+              <a:t>Function. Move on after a learner can explain the current example or required action.</a:t>
+            </a:r>
+          </a:p>
+        </p:txBody>
+      </p:sp>
+      <p:sp>
+        <p:nvSpPr>
+          <p:cNvPr id="4" name="Slide Number Placeholder 3"/>
+          <p:cNvSpPr>
+            <a:spLocks noGrp="1"/>
+          </p:cNvSpPr>
+          <p:nvPr>
+            <p:ph type="sldNum" idx="5" sz="quarter"/>
+          </p:nvPr>
+        </p:nvSpPr>
+        <p:spPr/>
+      </p:sp>
+    </p:spTree>
+  </p:cSld>
+  <p:clrMapOvr>
+    <a:masterClrMapping/>
+  </p:clrMapOvr>
+</p:notes>
+</file>
+
+<file path=ppt/notesSlides/notesSlide8.xml><?xml version="1.0" encoding="utf-8"?>
+<p:notes xmlns:a="http://schemas.openxmlformats.org/drawingml/2006/main" xmlns:p="http://schemas.openxmlformats.org/presentationml/2006/main">
+  <p:cSld>
+    <p:spTree>
+      <p:nvGrpSpPr>
+        <p:cNvPr id="1" name=""/>
+        <p:cNvGrpSpPr/>
+        <p:nvPr/>
+      </p:nvGrpSpPr>
+      <p:grpSpPr>
+        <a:xfrm>
+          <a:off x="0" y="0"/>
+          <a:ext cx="0" cy="0"/>
+          <a:chOff x="0" y="0"/>
+          <a:chExt cx="0" cy="0"/>
+        </a:xfrm>
+      </p:grpSpPr>
+      <p:sp>
+        <p:nvSpPr>
+          <p:cNvPr id="2" name="Slide Image Placeholder 1"/>
+          <p:cNvSpPr>
+            <a:spLocks noGrp="1"/>
+          </p:cNvSpPr>
+          <p:nvPr>
+            <p:ph type="sldImg" idx="2"/>
+          </p:nvPr>
+        </p:nvSpPr>
+        <p:spPr/>
+      </p:sp>
+      <p:sp>
+        <p:nvSpPr>
+          <p:cNvPr id="3" name="Notes Placeholder 2"/>
+          <p:cNvSpPr>
+            <a:spLocks noGrp="1"/>
+          </p:cNvSpPr>
+          <p:nvPr>
+            <p:ph type="body" idx="3" sz="quarter"/>
+          </p:nvPr>
+        </p:nvSpPr>
+        <p:spPr/>
+        <p:txBody>
+          <a:bodyPr/>
+          <a:lstStyle/>
+          <a:p>
+            <a:r>
+              <a:t>TEACHING PURPOSE</a:t>
+            </a:r>
+          </a:p>
+          <a:p>
+            <a:r>
+              <a:t>Function</a:t>
+            </a:r>
+          </a:p>
+          <a:p>
+            <a:r>
+              <a:t/>
+            </a:r>
+          </a:p>
+          <a:p>
+            <a:r>
+              <a:t>CONNECT</a:t>
+            </a:r>
+          </a:p>
+          <a:p>
+            <a:r>
+              <a:t>Build on the preceding slide: Variable.</a:t>
+            </a:r>
+          </a:p>
+          <a:p>
+            <a:r>
+              <a:t/>
+            </a:r>
+          </a:p>
+          <a:p>
+            <a:r>
+              <a:t>LECTURER CUE</a:t>
+            </a:r>
+          </a:p>
+          <a:p>
+            <a:r>
+              <a:t>A named instruction that takes inputs, does something, and gives back a result. You use other people's and you write your own.</a:t>
+            </a:r>
+          </a:p>
+          <a:p>
+            <a:r>
+              <a:t/>
+            </a:r>
+          </a:p>
+          <a:p>
+            <a:r>
+              <a:t>EXPLAIN IN ORDINARY WORDS</a:t>
+            </a:r>
+          </a:p>
+          <a:p>
+            <a:r>
+              <a:t>A function is a named set of instructions. def defines it; a call runs it with inputs. Parameters are input names, arguments are supplied values, and return sends the result back.</a:t>
+            </a:r>
+          </a:p>
+          <a:p>
+            <a:r>
+              <a:t/>
+            </a:r>
+          </a:p>
+          <a:p>
+            <a:r>
+              <a:t>CHECK AND EXPECTED ANSWER</a:t>
+            </a:r>
+          </a:p>
+          <a:p>
+            <a:r>
+              <a:t>Does print(8) return the number 8 to the caller? No; it displays 8 and returns None. A function needing a numeric result should return it.</a:t>
+            </a:r>
+          </a:p>
+          <a:p>
+            <a:r>
+              <a:t/>
+            </a:r>
+          </a:p>
+          <a:p>
+            <a:r>
+              <a:t>IF LEARNERS ARE STUCK</a:t>
+            </a:r>
+          </a:p>
+          <a:p>
+            <a:r>
+              <a:t>Trace one call: bind input names, run the indented body, reach return, then put the returned result back into the calling expression.</a:t>
+            </a:r>
+          </a:p>
+          <a:p>
+            <a:r>
+              <a:t/>
+            </a:r>
+          </a:p>
+          <a:p>
+            <a:r>
+              <a:t>NEXT</a:t>
+            </a:r>
+          </a:p>
+          <a:p>
+            <a:r>
+              <a:t>Library. Move on after a learner can explain the current example or required action.</a:t>
+            </a:r>
+          </a:p>
+        </p:txBody>
+      </p:sp>
+      <p:sp>
+        <p:nvSpPr>
+          <p:cNvPr id="4" name="Slide Number Placeholder 3"/>
+          <p:cNvSpPr>
+            <a:spLocks noGrp="1"/>
+          </p:cNvSpPr>
+          <p:nvPr>
+            <p:ph type="sldNum" idx="5" sz="quarter"/>
+          </p:nvPr>
+        </p:nvSpPr>
+        <p:spPr/>
+      </p:sp>
+    </p:spTree>
+  </p:cSld>
+  <p:clrMapOvr>
+    <a:masterClrMapping/>
+  </p:clrMapOvr>
+</p:notes>
+</file>
+
+<file path=ppt/notesSlides/notesSlide9.xml><?xml version="1.0" encoding="utf-8"?>
+<p:notes xmlns:a="http://schemas.openxmlformats.org/drawingml/2006/main" xmlns:p="http://schemas.openxmlformats.org/presentationml/2006/main">
+  <p:cSld>
+    <p:spTree>
+      <p:nvGrpSpPr>
+        <p:cNvPr id="1" name=""/>
+        <p:cNvGrpSpPr/>
+        <p:nvPr/>
+      </p:nvGrpSpPr>
+      <p:grpSpPr>
+        <a:xfrm>
+          <a:off x="0" y="0"/>
+          <a:ext cx="0" cy="0"/>
+          <a:chOff x="0" y="0"/>
+          <a:chExt cx="0" cy="0"/>
+        </a:xfrm>
+      </p:grpSpPr>
+      <p:sp>
+        <p:nvSpPr>
+          <p:cNvPr id="2" name="Slide Image Placeholder 1"/>
+          <p:cNvSpPr>
+            <a:spLocks noGrp="1"/>
+          </p:cNvSpPr>
+          <p:nvPr>
+            <p:ph type="sldImg" idx="2"/>
+          </p:nvPr>
+        </p:nvSpPr>
+        <p:spPr/>
+      </p:sp>
+      <p:sp>
+        <p:nvSpPr>
+          <p:cNvPr id="3" name="Notes Placeholder 2"/>
+          <p:cNvSpPr>
+            <a:spLocks noGrp="1"/>
+          </p:cNvSpPr>
+          <p:nvPr>
+            <p:ph type="body" idx="3" sz="quarter"/>
+          </p:nvPr>
+        </p:nvSpPr>
+        <p:spPr/>
+        <p:txBody>
+          <a:bodyPr/>
+          <a:lstStyle/>
+          <a:p>
+            <a:r>
+              <a:t>TEACHING PURPOSE</a:t>
+            </a:r>
+          </a:p>
+          <a:p>
+            <a:r>
+              <a:t>Library</a:t>
+            </a:r>
+          </a:p>
+          <a:p>
+            <a:r>
+              <a:t/>
+            </a:r>
+          </a:p>
+          <a:p>
+            <a:r>
+              <a:t>CONNECT</a:t>
+            </a:r>
+          </a:p>
+          <a:p>
+            <a:r>
+              <a:t>Build on the preceding slide: Function.</a:t>
+            </a:r>
+          </a:p>
+          <a:p>
+            <a:r>
+              <a:t/>
+            </a:r>
+          </a:p>
+          <a:p>
+            <a:r>
+              <a:t>LECTURER CUE</a:t>
+            </a:r>
+          </a:p>
+          <a:p>
+            <a:r>
               <a:t>Somebody else's functions, loaded when you need them. You will use one library, pandas, for almost everything in weeks three and four.</a:t>
+            </a:r>
+          </a:p>
+          <a:p>
+            <a:r>
+              <a:t/>
+            </a:r>
+          </a:p>
+          <a:p>
+            <a:r>
+              <a:t>EXPLAIN IN ORDINARY WORDS</a:t>
+            </a:r>
+          </a:p>
+          <a:p>
+            <a:r>
+              <a:t>A DataFrame is a labelled table. A Series is a single labelled sequence, often one column. A dtype describes stored values, but the import may infer something unsuitable.</a:t>
+            </a:r>
+          </a:p>
+          <a:p>
+            <a:r>
+              <a:t/>
+            </a:r>
+          </a:p>
+          <a:p>
+            <a:r>
+              <a:t>CHECK AND EXPECTED ANSWER</a:t>
+            </a:r>
+          </a:p>
+          <a:p>
+            <a:r>
+              <a:t>Does a price that looks numeric prove the column is numeric? No. Inspect its dtype and troublesome values before conversion.</a:t>
+            </a:r>
+          </a:p>
+          <a:p>
+            <a:r>
+              <a:t/>
+            </a:r>
+          </a:p>
+          <a:p>
+            <a:r>
+              <a:t>IF LEARNERS ARE STUCK</a:t>
+            </a:r>
+          </a:p>
+          <a:p>
+            <a:r>
+              <a:t>Use head, shape and dtypes to locate the table, count rows/columns and inspect storage. Check units and missing values before calculating.</a:t>
+            </a:r>
+          </a:p>
+          <a:p>
+            <a:r>
+              <a:t/>
+            </a:r>
+          </a:p>
+          <a:p>
+            <a:r>
+              <a:t>NEXT</a:t>
+            </a:r>
+          </a:p>
+          <a:p>
+            <a:r>
+              <a:t>Traceback. Move on after a learner can explain the current example or required action.</a:t>
             </a:r>
           </a:p>
         </p:txBody>
@@ -7358,7 +9505,7 @@
                 </a:solidFill>
                 <a:latin typeface="Calibri"/>
               </a:rPr>
-              <a:t>import pandas as pd, and the first DataFrame. read_csv, then shape, then head. Three commands, and the room can see their own data in a new tool. Then the two things that catch every Excel user: counting from zero, and a</a:t>
+              <a:t>import pandas as pd, and the first DataFrame.</a:t>
             </a:r>
           </a:p>
         </p:txBody>
@@ -8574,7 +10721,7 @@
         <p:spPr>
           <a:xfrm>
             <a:off x="685800" y="1600200"/>
-            <a:ext cx="10820095" cy="1100371"/>
+            <a:ext cx="10820095" cy="1603291"/>
           </a:xfrm>
           <a:prstGeom prst="rect">
             <a:avLst/>
@@ -8615,7 +10762,7 @@
         </p:nvSpPr>
         <p:spPr>
           <a:xfrm>
-            <a:off x="685800" y="2792011"/>
+            <a:off x="685800" y="3477811"/>
             <a:ext cx="10820095" cy="457200"/>
           </a:xfrm>
           <a:prstGeom prst="rect">
@@ -11721,7 +13868,7 @@
         <p:spPr>
           <a:xfrm>
             <a:off x="685800" y="1911095"/>
-            <a:ext cx="10820095" cy="969264"/>
+            <a:ext cx="10820095" cy="1236629"/>
           </a:xfrm>
           <a:prstGeom prst="roundRect">
             <a:avLst>
@@ -11766,7 +13913,7 @@
         <p:spPr>
           <a:xfrm>
             <a:off x="978408" y="2112264"/>
-            <a:ext cx="10234879" cy="603504"/>
+            <a:ext cx="10234879" cy="870869"/>
           </a:xfrm>
           <a:prstGeom prst="rect">
             <a:avLst/>
@@ -11807,7 +13954,7 @@
         </p:nvSpPr>
         <p:spPr>
           <a:xfrm>
-            <a:off x="685800" y="3191256"/>
+            <a:off x="685800" y="3422045"/>
             <a:ext cx="10820095" cy="310896"/>
           </a:xfrm>
           <a:prstGeom prst="rect">
@@ -11833,7 +13980,7 @@
                 </a:solidFill>
                 <a:latin typeface="Calibri"/>
               </a:rPr>
-              <a:t>Work these questions in order:</a:t>
+              <a:t>Work these questions in order</a:t>
             </a:r>
           </a:p>
         </p:txBody>
@@ -11846,8 +13993,8 @@
         </p:nvSpPr>
         <p:spPr>
           <a:xfrm>
-            <a:off x="685800" y="3611879"/>
-            <a:ext cx="5227167" cy="365760"/>
+            <a:off x="685800" y="3897533"/>
+            <a:ext cx="5227167" cy="385501"/>
           </a:xfrm>
           <a:prstGeom prst="rect">
             <a:avLst/>
@@ -11875,7 +14022,7 @@
                 </a:solidFill>
                 <a:latin typeface="Calibri"/>
               </a:rPr>
-              <a:t>→  Three variables, of three different types.</a:t>
+              <a:t>Three variables, of three different types.</a:t>
             </a:r>
           </a:p>
         </p:txBody>
@@ -11888,8 +14035,8 @@
         </p:nvSpPr>
         <p:spPr>
           <a:xfrm>
-            <a:off x="685800" y="4032504"/>
-            <a:ext cx="5227167" cy="365760"/>
+            <a:off x="685800" y="4374475"/>
+            <a:ext cx="5227167" cy="385501"/>
           </a:xfrm>
           <a:prstGeom prst="rect">
             <a:avLst/>
@@ -11917,7 +14064,7 @@
                 </a:solidFill>
                 <a:latin typeface="Calibri"/>
               </a:rPr>
-              <a:t>→  A list, and print its first item and its length.</a:t>
+              <a:t>A list, and print its first item and its length.</a:t>
             </a:r>
           </a:p>
         </p:txBody>
@@ -11930,8 +14077,8 @@
         </p:nvSpPr>
         <p:spPr>
           <a:xfrm>
-            <a:off x="685800" y="4453128"/>
-            <a:ext cx="5227167" cy="365760"/>
+            <a:off x="685800" y="4851416"/>
+            <a:ext cx="5227167" cy="697851"/>
           </a:xfrm>
           <a:prstGeom prst="rect">
             <a:avLst/>
@@ -11959,7 +14106,7 @@
                 </a:solidFill>
                 <a:latin typeface="Calibri"/>
               </a:rPr>
-              <a:t>→  A function you write, and call twice with different inputs.</a:t>
+              <a:t>A function you write, and call twice with different inputs.</a:t>
             </a:r>
           </a:p>
         </p:txBody>
@@ -11972,8 +14119,8 @@
         </p:nvSpPr>
         <p:spPr>
           <a:xfrm>
-            <a:off x="6278727" y="3611879"/>
-            <a:ext cx="5227167" cy="365760"/>
+            <a:off x="6278727" y="3897533"/>
+            <a:ext cx="5227167" cy="697851"/>
           </a:xfrm>
           <a:prstGeom prst="rect">
             <a:avLst/>
@@ -12001,7 +14148,7 @@
                 </a:solidFill>
                 <a:latin typeface="Calibri"/>
               </a:rPr>
-              <a:t>→  Load data/orders.csv and print its shape and its first five rows.</a:t>
+              <a:t>Load data/orders.csv and print its shape and its first five rows.</a:t>
             </a:r>
           </a:p>
         </p:txBody>
@@ -12014,8 +14161,8 @@
         </p:nvSpPr>
         <p:spPr>
           <a:xfrm>
-            <a:off x="6278727" y="4032504"/>
-            <a:ext cx="5227167" cy="365760"/>
+            <a:off x="6278727" y="4686824"/>
+            <a:ext cx="5227167" cy="697851"/>
           </a:xfrm>
           <a:prstGeom prst="rect">
             <a:avLst/>
@@ -12043,7 +14190,7 @@
                 </a:solidFill>
                 <a:latin typeface="Calibri"/>
               </a:rPr>
-              <a:t>→  Make all three errors from the slide on purpose, and write down what the last line of each traceback said.</a:t>
+              <a:t>Make all three errors from the slide on purpose, and write down what the last line of each traceback said.</a:t>
             </a:r>
           </a:p>
         </p:txBody>
@@ -12056,8 +14203,8 @@
         </p:nvSpPr>
         <p:spPr>
           <a:xfrm>
-            <a:off x="6278727" y="4453128"/>
-            <a:ext cx="5227167" cy="365760"/>
+            <a:off x="6278727" y="5476116"/>
+            <a:ext cx="5227167" cy="385501"/>
           </a:xfrm>
           <a:prstGeom prst="rect">
             <a:avLst/>
@@ -12085,7 +14232,7 @@
                 </a:solidFill>
                 <a:latin typeface="Calibri"/>
               </a:rPr>
-              <a:t>→  Filter to delivered orders and check you get 4,837.</a:t>
+              <a:t>Filter to delivered orders and check you get 4,837.</a:t>
             </a:r>
           </a:p>
         </p:txBody>
@@ -15452,7 +17599,7 @@
                 </a:solidFill>
                 <a:latin typeface="Calibri"/>
               </a:rPr>
-              <a:t>You already write code. Open a spreadsheet formula, =IF(B2&gt;1000, "large", "small"), and name its parts: a function, its arguments, a condition, a result. Python is that with the brackets in different places. Then, live: </a:t>
+              <a:t>You already write code.</a:t>
             </a:r>
           </a:p>
         </p:txBody>
